--- a/deck/EC4308_Presentation.pptx
+++ b/deck/EC4308_Presentation.pptx
@@ -4945,7 +4945,7 @@
             <a:pPr/>
             <a:r>
               <a:rPr sz="1600"/>
-              <a:t>Switching (10 bps): model strategies cap the max drawdown at 0.2337 vs buy-and-hold −0.55; terminal wealth $67.651 vs $346.470262259372 for buy-and-hold.</a:t>
+              <a:t>Switching (10 bps): model strategies cap the max drawdown at -23% vs buy-and-hold -50%; terminal wealth $67.651 vs $346.470262259372 for buy-and-hold.</a:t>
             </a:r>
           </a:p>
           <a:p>

--- a/deck/EC4308_Presentation.pptx
+++ b/deck/EC4308_Presentation.pptx
@@ -5015,16 +5015,40 @@
           </a:p>
         </p:txBody>
       </p:sp>
-      <p:sp>
-        <p:nvSpPr>
-          <p:cNvPr id="3" name="TextBox 2"/>
+      <p:pic>
+        <p:nvPicPr>
+          <p:cNvPr id="3" name="Picture 2" descr="figure4_subperiods.png"/>
+          <p:cNvPicPr>
+            <a:picLocks noChangeAspect="1"/>
+          </p:cNvPicPr>
+          <p:nvPr/>
+        </p:nvPicPr>
+        <p:blipFill>
+          <a:blip r:embed="rId2"/>
+          <a:stretch>
+            <a:fillRect/>
+          </a:stretch>
+        </p:blipFill>
+        <p:spPr>
+          <a:xfrm>
+            <a:off x="548640" y="1371600"/>
+            <a:ext cx="5669280" cy="3401568"/>
+          </a:xfrm>
+          <a:prstGeom prst="rect">
+            <a:avLst/>
+          </a:prstGeom>
+        </p:spPr>
+      </p:pic>
+      <p:sp>
+        <p:nvSpPr>
+          <p:cNvPr id="4" name="TextBox 3"/>
           <p:cNvSpPr txBox="1"/>
           <p:nvPr/>
         </p:nvSpPr>
         <p:spPr>
           <a:xfrm>
-            <a:off x="640080" y="1280160"/>
-            <a:ext cx="10881360" cy="4937760"/>
+            <a:off x="6400800" y="1371600"/>
+            <a:ext cx="5394960" cy="4572000"/>
           </a:xfrm>
           <a:prstGeom prst="rect">
             <a:avLst/>

--- a/deck/EC4308_Presentation.pptx
+++ b/deck/EC4308_Presentation.pptx
@@ -4693,7 +4693,7 @@
             <a:pPr/>
             <a:r>
               <a:rPr sz="1600"/>
-              <a:t>On their 1966–2011 sample: VOL_2_12 R²_OOS = +0.661% (CW p = 0.0152), VOL_3_12 = +0.762% (p = 0.0294) — positive and significant, as published (+0.33%).</a:t>
+              <a:t>On their 1966–2011 sample: VOL_2_12 R²_OOS = +0.661% (CW p = 0.0152), VOL_3_12 = +0.762% (p = 0.0294) — positive and significant, same sign and order of magnitude as published (+0.33%).</a:t>
             </a:r>
           </a:p>
           <a:p>

--- a/deck/EC4308_Presentation.pptx
+++ b/deck/EC4308_Presentation.pptx
@@ -4342,7 +4342,7 @@
             <a:pPr/>
             <a:r>
               <a:rPr sz="1600"/>
-              <a:t>Goyal &amp; Welch: essentially no macro fundamental beats the prevailing mean out-of-sample; Goyal–Welch–Zafirov (2024) reach the same conclusion with 57 predictors.</a:t>
+              <a:t>Goyal &amp; Welch: essentially no macro fundamental beats the prevailing mean out-of-sample; Goyal–Welch–Zafirov (2024) reach the same conclusion with an expanded dataset of 57 monthly series.</a:t>
             </a:r>
           </a:p>
           <a:p>
@@ -4833,7 +4833,7 @@
             <a:pPr/>
             <a:r>
               <a:rPr sz="1600"/>
-              <a:t>Hit rates 54–58% vs PM 61% — the direction of the premium is also hard to call.</a:t>
+              <a:t>Hit rates 54–58% vs PM 60% — the direction of the premium is also hard to call.</a:t>
             </a:r>
           </a:p>
           <a:p>
